--- a/docs/FutureMirror答辩.pptx
+++ b/docs/FutureMirror答辩.pptx
@@ -9695,7 +9695,7 @@
   <p:cSld>
     <p:spTree>
       <p:nvGrpSpPr>
-        <p:cNvPr id="174" name="" descr="&lt;Slide style={{&#10;    width: '1280px',&#10;    height: '720px',&#10;    background: '#FFFFFF',&#10;    padding: 0,&#10;    position: 'relative',&#10;    overflow: 'hidden',&#10;    fontFamily: &quot;'Noto Sans SC','Source Han Sans SC','PingFang SC','Microsoft YaHei',sans-serif&quot;,&#10;}}&gt;&#10;    {/* ===== 母版：A3 深蓝顶条 ===== */}&#10;    &lt;Box style={{ position: 'absolute', top: 0, left: 0, width: '1280px', height: 84, background: '#0E3F8C' }}&gt;&#10;        &lt;svg style={{ position: 'absolute', right: 210, top: 18, opacity: 0.16 }} width={150} height={48} viewBox='0 0 150 48'&gt;&#10;            &lt;g stroke='#FFFFFF' strokeWidth='1.2' fill='none'&gt;&#10;                &lt;path d='M2 24 L28 24 L38 10 L74 10 L84 24 L120 24 L130 38 L148 38' /&gt;&#10;                &lt;path d='M38 10 L38 38 L74 38' /&gt;&#10;                &lt;circle cx='28' cy='24' r='3' fill='#FFFFFF' /&gt;&#10;                &lt;circle cx='84' cy='24' r='3' fill='#FFFFFF' /&gt;&#10;            &lt;/g&gt;&#10;        &lt;/svg&gt;&#10;        &lt;Box style={{ position: 'absolute', left: 40, top: 0, height: 84, justifyContent: 'center' }}&gt;&#10;            &lt;Text style={{ fontSize: 26, fontWeight: 'bold', color: '#FFFFFF' }}&gt;&#10;                工程质量：全量回归 + 四渠道发布流水线&#10;            &lt;/Text&gt;&#10;        &lt;/Box&gt;&#10;        &lt;Box style={{ position: 'absolute', right: 40, top: 24, background: '#1E4FA8', padding: '7px 16px', borderRadius: 14 }}&gt;&#10;            &lt;Text style={{ fontSize: 14, color: '#FFFFFF', letterSpacing: 1 }}&gt;&#10;                03 真实完成度&#10;            &lt;/Text&gt;&#10;        &lt;/Box&gt;&#10;    &lt;/Box&gt;&#10;    {/* ===== 左侧标题栏 ===== */}&#10;    &lt;Box style={{ position: 'absolute', top: 84, left: 0, width: 356, height: 572, background: '#0E3F8C', padding: '30px 32px 26px 40px', boxSizing: 'border-box', flexDirection: 'column' }}&gt;&#10;        &lt;Text style={{ fontSize: 14, color: '#9FB9E4', letterSpacing: 4 }}&gt;&#10;            测试与发布&#10;        &lt;/Text&gt;&#10;        &lt;Text style={{ fontSize: 30, fontWeight: 'bold', color: '#FFFFFF', marginTop: 14, lineHeight: 1.35 }}&gt;&#10;            全量回归纪律&#10;        &lt;/Text&gt;&#10;        &lt;Box style={{ width: 48, height: 4, background: '#FFC107', marginTop: 18 }} /&gt;&#10;        &lt;Text style={{ fontSize: 15, color: '#D7E3F5', lineHeight: 1.85, marginTop: 18 }}&gt;&#10;            每次改动必须全绿才提交——测试不是演示后的补丁，而是改动发生时的第一道闸门。能复现的工程纪律，是「团队可完整解释全部代码」的底座。&#10;        &lt;/Text&gt;&#10;        &lt;Box style={{ flex: 1 }} /&gt;&#10;        &lt;Box style={{ background: '#1E4FA8', padding: '14px 16px' }}&gt;&#10;            &lt;Text style={{ fontSize: 15, fontWeight: 'bold', color: '#FFFFFF' }}&gt;&#10;                发布链&#10;            &lt;/Text&gt;&#10;            &lt;Text style={{ fontSize: 14, color: '#D7E3F5', marginTop: 6, lineHeight: 1.6 }}&gt;&#10;                repo → Pages → 镜像 → Release&lt;br /&gt;每次变更后逐一核验&#10;            &lt;/Text&gt;&#10;        &lt;/Box&gt;&#10;    &lt;/Box&gt;&#10;    {/* ===== 右侧测试矩阵 + 发布链 ===== */}&#10;    &lt;Box style={{ position: 'absolute', top: 84, left: 356, width: 924, height: 572, padding: '24px 36px', boxSizing: 'border-box' }}&gt;&#10;        &lt;Text style={{ fontSize: 16, fontWeight: 'bold', color: '#0E3F8C', letterSpacing: 1 }}&gt;&#10;            测试矩阵（全部可当场重跑）&#10;        &lt;/Text&gt;&#10;        &lt;Box style={{ marginTop: 12, height: 252 }}&gt;&#10;            &lt;Table&#10;                style={{ width: '100%', height: 252 }}&#10;                defaultTextStyle={{ fontSize: 13.5, textAlign: 'center', color: '#1A2230' }}&#10;                defaultCellStyle={{&#10;                    border: {&#10;                        left: { width: 1, color: '#D6DCE5' },&#10;                        right: { width: 1, color: '#D6DCE5' },&#10;                        top: { width: 1, color: '#D6DCE5' },&#10;                        bottom: { width: 1, color: '#D6DCE5' },&#10;                    },&#10;                }}&#10;                cells={[&#10;                    [&#10;                        { text: '层', textStyle: { bold: true, color: '#FFFFFF' }, cellStyle: { background: { color: '#0E3F8C' } } },&#10;                        { text: '规模', textStyle: { bold: true, color: '#FFFFFF' }, cellStyle: { background: { color: '#0E3F8C' } } },&#10;                        { text: '覆盖内容', textStyle: { bold: true, color: '#FFFFFF' }, cellStyle: { background: { color: '#0E3F8C' } } },&#10;                    ],&#10;                    [&#10;                        { text: '前端', textStyle: { bold: true, color: '#0E3F8C' } },&#10;                        { text: '11 套 · 879 断言', textStyle: { bold: true, color: '#1E4FA8' } },&#10;                        { text: 'jsdom 端到端（含 RAG 重排专项 9 条）' },&#10;                    ],&#10;                    [&#10;                        { text: '后端', textStyle: { bold: true, color: '#0E3F8C' }, cellStyle: { background: { color: '#F7F9FC' } } },&#10;                        { text: '17 项 pytest', textStyle: { bold: true, color: '#1E4FA8' }, cellStyle: { background: { color: '#F7F9FC' } } },&#10;                        { text: '含评分校准不变量 11 条（单调性 / 维度分离 / 确定性）', cellStyle: { background: { color: '#F7F9FC' } } },&#10;                    ],&#10;                    [&#10;                        { text: '单元', textStyle: { bold: true, color: '#0E3F8C' } },&#10;                        { text: '16 项 vitest', textStyle: { bold: true, color: '#1E4FA8' } },&#10;                        { text: 'RAG 重排 / 检索契约（Next 服务端同策略）' },&#10;                    ],&#10;                    [&#10;                        { text: '对拍', textStyle: { bold: true, color: '#0E3F8C' }, cellStyle: { background: { color: '#F7F9FC' } } },&#10;                        { text: '5/5 一致', textStyle: { bold: true, color: '#1E4FA8' }, cellStyle: { background: { color: '#F7F9FC' } } },&#10;                        { text: '双引擎评分共用同一份标准样本逐维度比对', cellStyle: { background: { color: '#F7F9FC' } } },&#10;                    ],&#10;                    [&#10;                        { text: '类型', textStyle: { bold: true, color: '#0E3F8C' } },&#10;                        { text: 'tsc 零错误', textStyle: { bold: true, color: '#1E4FA8' } },&#10;                        { text: '全量 TypeScript 编译通过' },&#10;                    ],&#10;                ]}&#10;            /&gt;&#10;        &lt;/Box&gt;&#10;        {/* 发布链节点串 */}&#10;        &lt;Text style={{ fontSize: 16, fontWeight: 'bold', color: '#0E3F8C', letterSpacing: 1, marginTop: 20 }}&gt;&#10;            四渠道发布流水线&#10;        &lt;/Text&gt;&#10;        &lt;Box style={{ flexDirection: 'row', alignItems: 'center', gap: 10, marginTop: 12 }}&gt;&#10;            &lt;Box style={{ flex: 1, background: '#E8EFF8', border: '1px solid #C9D8F0', padding: '12px 8px', alignItems: 'center' }}&gt;&#10;                &lt;Text style={{ fontSize: 15, fontWeight: 'bold', color: '#0E3F8C' }}&gt;repo (main)&lt;/Text&gt;&#10;                &lt;Text style={{ fontSize: 12, color: '#4A5568', marginTop: 3 }}&gt;代码与文档单一事实源&lt;/Text&gt;&#10;            &lt;/Box&gt;&#10;            &lt;FAIcon name='arrow-right' style={{ fill: '#1E4FA8', width: 20, height: 20 }} /&gt;&#10;            &lt;Box style={{ flex: 1, background: '#E8EFF8', border: '1px solid #C9D8F0', padding: '12px 8px', alignItems: 'center' }}&gt;&#10;                &lt;Text style={{ fontSize: 15, fontWeight: 'bold', color: '#0E3F8C' }}&gt;GitHub Pages&lt;/Text&gt;&#10;                &lt;Text style={{ fontSize: 12, color: '#4A5568', marginTop: 3 }}&gt;海外演示入口&lt;/Text&gt;&#10;            &lt;/Box&gt;&#10;            &lt;FAIcon name='arrow-right' style={{ fill: '#1E4FA8', width: 20, height: 20 }} /&gt;&#10;            &lt;Box style={{ flex: 1, background: '#E8EFF8', border: '1px solid #C9D8F0', padding: '12px 8px', alignItems: 'center' }}&gt;&#10;                &lt;Text style={{ fontSize: 15, fontWeight: 'bold', color: '#0E3F8C' }}&gt;国内镜像&lt;/Text&gt;&#10;                &lt;Text style={{ fontSize: 12, color: '#4A5568', marginTop: 3 }}&gt;同源后端 · 赛场直连&lt;/Text&gt;&#10;            &lt;/Box&gt;&#10;            &lt;FAIcon name='arrow-right' style={{ fill: '#1E4FA8', width: 20, height: 20 }} /&gt;&#10;            &lt;Box style={{ flex: 1, background: '#E8EFF8', border: '1px solid #C9D8F0', padding: '12px 8px', alignItems: 'center' }}&gt;&#10;                &lt;Text style={{ fontSize: 15, fontWeight: 'bold', color: '#0E3F8C' }}&gt;Release 附件&lt;/Text&gt;&#10;                &lt;Text style={{ fontSize: 12, color: '#4A5568', marginTop: 3 }}&gt;demo / 文档 / PDF / 日志&lt;/Text&gt;&#10;            &lt;/Box&gt;&#10;        &lt;/Box&gt;&#10;    &lt;/Box&gt;&#10;    {/* ===== 母版：页脚 ===== */}&#10;    &lt;Box style={{ position: 'absolute', bottom: 0, left: 0, width: '1280px', height: 64, borderTop: '1px solid #E5E7EB', flexDirection: 'row', alignItems: 'center', justifyContent: 'space-between', padding: '0 40px', boxSizing: 'border-box' }}&gt;&#10;        &lt;Text style={{ fontSize: 13, color: '#8B97A8' }}&gt;&#10;            面镜 FutureMirror · 竞赛答辩&#10;        &lt;/Text&gt;&#10;        &lt;Text style={{ fontSize: 14, color: '#1E4FA8', fontWeight: 'bold' }}&gt;&#10;            14 / 16&#10;        &lt;/Text&gt;&#10;    &lt;/Box&gt;&#10;&lt;/Slide&gt;&#10;"/>
+        <p:cNvPr id="174" name="" descr="&lt;Slide style={{&#10;    width: '1280px',&#10;    height: '720px',&#10;    background: '#FFFFFF',&#10;    padding: 0,&#10;    position: 'relative',&#10;    overflow: 'hidden',&#10;    fontFamily: &quot;'Noto Sans SC','Source Han Sans SC','PingFang SC','Microsoft YaHei',sans-serif&quot;,&#10;}}&gt;&#10;    {/* ===== 母版：A3 深蓝顶条 ===== */}&#10;    &lt;Box style={{ position: 'absolute', top: 0, left: 0, width: '1280px', height: 84, background: '#0E3F8C' }}&gt;&#10;        &lt;svg style={{ position: 'absolute', right: 210, top: 18, opacity: 0.16 }} width={150} height={48} viewBox='0 0 150 48'&gt;&#10;            &lt;g stroke='#FFFFFF' strokeWidth='1.2' fill='none'&gt;&#10;                &lt;path d='M2 24 L28 24 L38 10 L74 10 L84 24 L120 24 L130 38 L148 38' /&gt;&#10;                &lt;path d='M38 10 L38 38 L74 38' /&gt;&#10;                &lt;circle cx='28' cy='24' r='3' fill='#FFFFFF' /&gt;&#10;                &lt;circle cx='84' cy='24' r='3' fill='#FFFFFF' /&gt;&#10;            &lt;/g&gt;&#10;        &lt;/svg&gt;&#10;        &lt;Box style={{ position: 'absolute', left: 40, top: 0, height: 84, justifyContent: 'center' }}&gt;&#10;            &lt;Text style={{ fontSize: 26, fontWeight: 'bold', color: '#FFFFFF' }}&gt;&#10;                工程质量：全量回归 + 四渠道发布流水线&#10;            &lt;/Text&gt;&#10;        &lt;/Box&gt;&#10;        &lt;Box style={{ position: 'absolute', right: 40, top: 24, background: '#1E4FA8', padding: '7px 16px', borderRadius: 14 }}&gt;&#10;            &lt;Text style={{ fontSize: 14, color: '#FFFFFF', letterSpacing: 1 }}&gt;&#10;                03 真实完成度&#10;            &lt;/Text&gt;&#10;        &lt;/Box&gt;&#10;    &lt;/Box&gt;&#10;    {/* ===== 左侧标题栏 ===== */}&#10;    &lt;Box style={{ position: 'absolute', top: 84, left: 0, width: 356, height: 572, background: '#0E3F8C', padding: '30px 32px 26px 40px', boxSizing: 'border-box', flexDirection: 'column' }}&gt;&#10;        &lt;Text style={{ fontSize: 14, color: '#9FB9E4', letterSpacing: 4 }}&gt;&#10;            测试与发布&#10;        &lt;/Text&gt;&#10;        &lt;Text style={{ fontSize: 30, fontWeight: 'bold', color: '#FFFFFF', marginTop: 14, lineHeight: 1.35 }}&gt;&#10;            全量回归纪律&#10;        &lt;/Text&gt;&#10;        &lt;Box style={{ width: 48, height: 4, background: '#FFC107', marginTop: 18 }} /&gt;&#10;        &lt;Text style={{ fontSize: 15, color: '#D7E3F5', lineHeight: 1.85, marginTop: 18 }}&gt;&#10;            每次改动必须全绿才提交——测试不是演示后的补丁，而是改动发生时的第一道闸门。能复现的工程纪律，是「团队可完整解释全部代码」的底座。&#10;        &lt;/Text&gt;&#10;        &lt;Box style={{ flex: 1 }} /&gt;&#10;        &lt;Box style={{ background: '#1E4FA8', padding: '14px 16px' }}&gt;&#10;            &lt;Text style={{ fontSize: 15, fontWeight: 'bold', color: '#FFFFFF' }}&gt;&#10;                发布链&#10;            &lt;/Text&gt;&#10;            &lt;Text style={{ fontSize: 14, color: '#D7E3F5', marginTop: 6, lineHeight: 1.6 }}&gt;&#10;                repo → Pages → 镜像 → Release&lt;br /&gt;每次变更后逐一核验&#10;            &lt;/Text&gt;&#10;        &lt;/Box&gt;&#10;    &lt;/Box&gt;&#10;    {/* ===== 右侧测试矩阵 + 发布链 ===== */}&#10;    &lt;Box style={{ position: 'absolute', top: 84, left: 356, width: 924, height: 572, padding: '24px 36px', boxSizing: 'border-box' }}&gt;&#10;        &lt;Text style={{ fontSize: 16, fontWeight: 'bold', color: '#0E3F8C', letterSpacing: 1 }}&gt;&#10;            测试矩阵（全部可当场重跑）&#10;        &lt;/Text&gt;&#10;        &lt;Box style={{ marginTop: 12, height: 252 }}&gt;&#10;            &lt;Table&#10;                style={{ width: '100%', height: 252 }}&#10;                defaultTextStyle={{ fontSize: 13.5, textAlign: 'center', color: '#1A2230' }}&#10;                defaultCellStyle={{&#10;                    border: {&#10;                        left: { width: 1, color: '#D6DCE5' },&#10;                        right: { width: 1, color: '#D6DCE5' },&#10;                        top: { width: 1, color: '#D6DCE5' },&#10;                        bottom: { width: 1, color: '#D6DCE5' },&#10;                    },&#10;                }}&#10;                cells={[&#10;                    [&#10;                        { text: '层', textStyle: { bold: true, color: '#FFFFFF' }, cellStyle: { background: { color: '#0E3F8C' } } },&#10;                        { text: '规模', textStyle: { bold: true, color: '#FFFFFF' }, cellStyle: { background: { color: '#0E3F8C' } } },&#10;                        { text: '覆盖内容', textStyle: { bold: true, color: '#FFFFFF' }, cellStyle: { background: { color: '#0E3F8C' } } },&#10;                    ],&#10;                    [&#10;                        { text: '前端', textStyle: { bold: true, color: '#0E3F8C' } },&#10;                        { text: '19 套 · 1427 断言', textStyle: { bold: true, color: '#1E4FA8' } },&#10;                        { text: 'jsdom 端到端（含 RAG 重排专项 9 条）' },&#10;                    ],&#10;                    [&#10;                        { text: '后端', textStyle: { bold: true, color: '#0E3F8C' }, cellStyle: { background: { color: '#F7F9FC' } } },&#10;                        { text: '27 项 pytest', textStyle: { bold: true, color: '#1E4FA8' }, cellStyle: { background: { color: '#F7F9FC' } } },&#10;                        { text: '含评分校准不变量 11 条（单调性 / 维度分离 / 确定性）', cellStyle: { background: { color: '#F7F9FC' } } },&#10;                    ],&#10;                    [&#10;                        { text: '单元', textStyle: { bold: true, color: '#0E3F8C' } },&#10;                        { text: '217 项 Node', textStyle: { bold: true, color: '#1E4FA8' } },&#10;                        { text: 'store / 用户系统 / 简历 / 报告逻辑' },&#10;                    ],&#10;                    [&#10;                        { text: '对拍', textStyle: { bold: true, color: '#0E3F8C' }, cellStyle: { background: { color: '#F7F9FC' } } },&#10;                        { text: '5/5 一致', textStyle: { bold: true, color: '#1E4FA8' }, cellStyle: { background: { color: '#F7F9FC' } } },&#10;                        { text: '双引擎评分共用同一份标准样本逐维度比对', cellStyle: { background: { color: '#F7F9FC' } } },&#10;                    ],&#10;                    [&#10;                        { text: '类型', textStyle: { bold: true, color: '#0E3F8C' } },&#10;                        { text: '静态校验', textStyle: { bold: true, color: '#1E4FA8' } },&#10;                        { text: 'JS 语法 / DOM id / 标签配平' },&#10;                    ],&#10;                ]}&#10;            /&gt;&#10;        &lt;/Box&gt;&#10;        {/* 发布链节点串 */}&#10;        &lt;Text style={{ fontSize: 16, fontWeight: 'bold', color: '#0E3F8C', letterSpacing: 1, marginTop: 20 }}&gt;&#10;            四渠道发布流水线&#10;        &lt;/Text&gt;&#10;        &lt;Box style={{ flexDirection: 'row', alignItems: 'center', gap: 10, marginTop: 12 }}&gt;&#10;            &lt;Box style={{ flex: 1, background: '#E8EFF8', border: '1px solid #C9D8F0', padding: '12px 8px', alignItems: 'center' }}&gt;&#10;                &lt;Text style={{ fontSize: 15, fontWeight: 'bold', color: '#0E3F8C' }}&gt;repo (main)&lt;/Text&gt;&#10;                &lt;Text style={{ fontSize: 12, color: '#4A5568', marginTop: 3 }}&gt;代码与文档单一事实源&lt;/Text&gt;&#10;            &lt;/Box&gt;&#10;            &lt;FAIcon name='arrow-right' style={{ fill: '#1E4FA8', width: 20, height: 20 }} /&gt;&#10;            &lt;Box style={{ flex: 1, background: '#E8EFF8', border: '1px solid #C9D8F0', padding: '12px 8px', alignItems: 'center' }}&gt;&#10;                &lt;Text style={{ fontSize: 15, fontWeight: 'bold', color: '#0E3F8C' }}&gt;GitHub Pages&lt;/Text&gt;&#10;                &lt;Text style={{ fontSize: 12, color: '#4A5568', marginTop: 3 }}&gt;海外演示入口&lt;/Text&gt;&#10;            &lt;/Box&gt;&#10;            &lt;FAIcon name='arrow-right' style={{ fill: '#1E4FA8', width: 20, height: 20 }} /&gt;&#10;            &lt;Box style={{ flex: 1, background: '#E8EFF8', border: '1px solid #C9D8F0', padding: '12px 8px', alignItems: 'center' }}&gt;&#10;                &lt;Text style={{ fontSize: 15, fontWeight: 'bold', color: '#0E3F8C' }}&gt;国内镜像&lt;/Text&gt;&#10;                &lt;Text style={{ fontSize: 12, color: '#4A5568', marginTop: 3 }}&gt;同源后端 · 赛场直连&lt;/Text&gt;&#10;            &lt;/Box&gt;&#10;            &lt;FAIcon name='arrow-right' style={{ fill: '#1E4FA8', width: 20, height: 20 }} /&gt;&#10;            &lt;Box style={{ flex: 1, background: '#E8EFF8', border: '1px solid #C9D8F0', padding: '12px 8px', alignItems: 'center' }}&gt;&#10;                &lt;Text style={{ fontSize: 15, fontWeight: 'bold', color: '#0E3F8C' }}&gt;Release 附件&lt;/Text&gt;&#10;                &lt;Text style={{ fontSize: 12, color: '#4A5568', marginTop: 3 }}&gt;demo / 文档 / PDF / 日志&lt;/Text&gt;&#10;            &lt;/Box&gt;&#10;        &lt;/Box&gt;&#10;    &lt;/Box&gt;&#10;    {/* ===== 母版：页脚 ===== */}&#10;    &lt;Box style={{ position: 'absolute', bottom: 0, left: 0, width: '1280px', height: 64, borderTop: '1px solid #E5E7EB', flexDirection: 'row', alignItems: 'center', justifyContent: 'space-between', padding: '0 40px', boxSizing: 'border-box' }}&gt;&#10;        &lt;Text style={{ fontSize: 13, color: '#8B97A8' }}&gt;&#10;            面镜 FutureMirror · 竞赛答辩&#10;        &lt;/Text&gt;&#10;        &lt;Text style={{ fontSize: 14, color: '#1E4FA8', fontWeight: 'bold' }}&gt;&#10;            14 / 16&#10;        &lt;/Text&gt;&#10;    &lt;/Box&gt;&#10;&lt;/Slide&gt;&#10;"/>
         <p:cNvGrpSpPr/>
         <p:nvPr/>
       </p:nvGrpSpPr>
@@ -10463,7 +10463,7 @@
                           <a:latin typeface="Microsoft YaHei"/>
                           <a:ea typeface="Microsoft YaHei"/>
                         </a:rPr>
-                        <a:t>11 套 · 879 断言</a:t>
+                        <a:t>19 套 · 1427 断言</a:t>
                       </a:r>
                       <a:endParaRPr/>
                     </a:p>
@@ -10590,7 +10590,7 @@
                           <a:latin typeface="Microsoft YaHei"/>
                           <a:ea typeface="Microsoft YaHei"/>
                         </a:rPr>
-                        <a:t>17 项 pytest</a:t>
+                        <a:t>27 项 pytest</a:t>
                       </a:r>
                       <a:endParaRPr/>
                     </a:p>
@@ -10720,7 +10720,7 @@
                           <a:latin typeface="Microsoft YaHei"/>
                           <a:ea typeface="Microsoft YaHei"/>
                         </a:rPr>
-                        <a:t>16 项 vitest</a:t>
+                        <a:t>217 项 Node</a:t>
                       </a:r>
                       <a:endParaRPr/>
                     </a:p>
@@ -10759,7 +10759,7 @@
                           <a:latin typeface="Microsoft YaHei"/>
                           <a:ea typeface="Microsoft YaHei"/>
                         </a:rPr>
-                        <a:t>RAG 重排 / 检索契约（Next 服务端同策略）</a:t>
+                        <a:t>store / 用户系统 / 简历 / 报告逻辑</a:t>
                       </a:r>
                       <a:endParaRPr/>
                     </a:p>
@@ -10977,7 +10977,7 @@
                           <a:latin typeface="Microsoft YaHei"/>
                           <a:ea typeface="Microsoft YaHei"/>
                         </a:rPr>
-                        <a:t>tsc 零错误</a:t>
+                        <a:t>静态校验</a:t>
                       </a:r>
                       <a:endParaRPr/>
                     </a:p>
@@ -11016,7 +11016,7 @@
                           <a:latin typeface="Microsoft YaHei"/>
                           <a:ea typeface="Microsoft YaHei"/>
                         </a:rPr>
-                        <a:t>全量 TypeScript 编译通过</a:t>
+                        <a:t>JS 语法 / DOM id / 标签配平</a:t>
                       </a:r>
                       <a:endParaRPr/>
                     </a:p>
@@ -15783,7 +15783,7 @@
   <p:cSld>
     <p:spTree>
       <p:nvGrpSpPr>
-        <p:cNvPr id="318" name="" descr="&lt;Slide style={{&#13;&#10;    width: '1280px',&#13;&#10;    height: '720px',&#13;&#10;    background: '#FFFFFF',&#13;&#10;    padding: 0,&#13;&#10;    position: 'relative',&#13;&#10;    overflow: 'hidden',&#13;&#10;    fontFamily: &quot;'Noto Sans SC','Source Han Sans SC','PingFang SC','Microsoft YaHei',sans-serif&quot;,&#13;&#10;}}&gt;&#13;&#10;    {/* 左：藏蓝巨数字面板 */}&#13;&#10;    &lt;Box style={{&#13;&#10;        position: 'absolute',&#13;&#10;        top: 0,&#13;&#10;        left: 0,&#13;&#10;        width: 460,&#13;&#10;        height: 720,&#13;&#10;        background: '#0E3F8C',&#13;&#10;        justifyContent: 'center',&#13;&#10;        alignItems: 'center',&#13;&#10;    }}&gt;&#13;&#10;        &lt;Text style={{ fontSize: 15, color: '#9FB9E4', letterSpacing: 6, marginBottom: 8 }}&gt;&#13;&#10;            CHAPTER&#13;&#10;        &lt;/Text&gt;&#13;&#10;        &lt;Text style={{ fontSize: 210, fontWeight: 'bold', color: '#FFFFFF', opacity: 0.28, lineHeight: 1 }}&gt;&#13;&#10;            01&#13;&#10;        &lt;/Text&gt;&#13;&#10;    &lt;/Box&gt;&#13;&#10;    {/* 右上：章节页眉带 */}&#13;&#10;    &lt;Box style={{&#13;&#10;        position: 'absolute',&#13;&#10;        top: 0,&#13;&#10;        left: 460,&#13;&#10;        width: 820,&#13;&#10;        height: 236,&#13;&#10;        background: '#F7F9FC',&#13;&#10;        borderBottom: '1px solid #E5E7EB',&#13;&#10;        padding: '0 72px',&#13;&#10;        boxSizing: 'border-box',&#13;&#10;        flexDirection: 'row',&#13;&#10;        alignItems: 'center',&#13;&#10;        justifyContent: 'space-between',&#13;&#10;    }}&gt;&#13;&#10;        &lt;Box style={{ width: 470, height: 120, justifyContent: 'center' }}&gt;&#13;&#10;            &lt;Text style={{ fontSize: 15, color: '#3D7BD9', letterSpacing: 4, fontWeight: 'bold' }}&gt;&#13;&#10;                第 01 章&#13;&#10;            &lt;/Text&gt;&#13;&#10;            &lt;Text style={{ fontSize: 44, fontWeight: 'bold', color: '#0E3F8C', marginTop: 14 }}&gt;&#13;&#10;                问题与方案&#13;&#10;            &lt;/Text&gt;&#13;&#10;            &lt;Box style={{ width: 72, height: 4, background: '#FFC107', marginTop: 22 }} /&gt;&#13;&#10;        &lt;/Box&gt;&#13;&#10;        &lt;Box style={{ height: 100, background: '#E8EFF8', padding: '0 24px', alignItems: 'center', justifyContent: 'center' }}&gt;&#13;&#10;            &lt;Text style={{ fontSize: 46, fontWeight: 'bold', color: '#1E4FA8', lineHeight: 1 }}&gt;&#13;&#10;                P3–P5&#13;&#10;            &lt;/Text&gt;&#13;&#10;            &lt;Text style={{ fontSize: 13, color: '#4A5568', marginTop: 8, letterSpacing: 3 }}&gt;&#13;&#10;                本章范围&#13;&#10;            &lt;/Text&gt;&#13;&#10;        &lt;/Box&gt;&#13;&#10;    &lt;/Box&gt;&#13;&#10;    {/* 右中：要点卡 */}&#13;&#10;    &lt;Box style={{ position: 'absolute', top: 236, left: 460, width: 820, height: 334, padding: '28px 72px 0 72px', boxSizing: 'border-box' }}&gt;&#13;&#10;        &lt;Box style={{ flexDirection: 'column', gap: 18 }}&gt;&#13;&#10;            &lt;Box style={{ background: '#FFFFFF', border: '1px solid #D6DCE5', borderLeft: '4px solid #1E4FA8', padding: '14px 20px', flexDirection: 'row', alignItems: 'center', justifyContent: 'space-between' }}&gt;&#13;&#10;                &lt;Box style={{ flexDirection: 'row', alignItems: 'flex-start', gap: 14 }}&gt;&#13;&#10;                    &lt;Box style={{ width: 10, height: 10, background: '#1E4FA8', marginTop: 9 }} /&gt;&#13;&#10;                    &lt;Box&gt;&#13;&#10;                        &lt;Text style={{ fontSize: 21, fontWeight: 'bold', color: '#1A2230' }}&gt;三个真实痛点&lt;/Text&gt;&#13;&#10;                        &lt;Text style={{ fontSize: 16, color: '#4A5568', marginTop: 5, lineHeight: 1.5 }}&gt;&#13;&#10;                            练不了真面试 · 只给分数不解释 · 断网即废&#13;&#10;                        &lt;/Text&gt;&#13;&#10;                    &lt;/Box&gt;&#13;&#10;                &lt;/Box&gt;&#13;&#10;                &lt;Box style={{ background: '#E8EFF8', padding: '6px 14px', marginLeft: 16 }}&gt;&#13;&#10;                    &lt;Text style={{ fontSize: 14, color: '#1E4FA8', fontWeight: 'bold' }}&gt;为什么做&lt;/Text&gt;&#13;&#10;                &lt;/Box&gt;&#13;&#10;            &lt;/Box&gt;&#13;&#10;            &lt;Box style={{ background: '#FFFFFF', border: '1px solid #D6DCE5', borderLeft: '4px solid #1E4FA8', padding: '14px 20px', flexDirection: 'row', alignItems: 'center', justifyContent: 'space-between' }}&gt;&#13;&#10;                &lt;Box style={{ flexDirection: 'row', alignItems: 'flex-start', gap: 14 }}&gt;&#13;&#10;                    &lt;Box style={{ width: 10, height: 10, background: '#1E4FA8', marginTop: 9 }} /&gt;&#13;&#10;                    &lt;Box&gt;&#13;&#10;                        &lt;Text style={{ fontSize: 21, fontWeight: 'bold', color: '#1A2230' }}&gt;对应的设计决策&lt;/Text&gt;&#13;&#10;                        &lt;Text style={{ fontSize: 16, color: '#4A5568', marginTop: 5, lineHeight: 1.5 }}&gt;&#13;&#10;                            五 Agent 圆桌按回答内容派发 · 每条评分引用原话 · 三级降级保底&#13;&#10;                        &lt;/Text&gt;&#13;&#10;                    &lt;/Box&gt;&#13;&#10;                &lt;/Box&gt;&#13;&#10;                &lt;Box style={{ background: '#E8EFF8', padding: '6px 14px', marginLeft: 16 }}&gt;&#13;&#10;                    &lt;Text style={{ fontSize: 14, color: '#1E4FA8', fontWeight: 'bold' }}&gt;如何解&lt;/Text&gt;&#13;&#10;                &lt;/Box&gt;&#13;&#10;            &lt;/Box&gt;&#13;&#10;            &lt;Box style={{ background: '#FFFFFF', border: '1px solid #D6DCE5', borderLeft: '4px solid #1E4FA8', padding: '14px 20px', flexDirection: 'row', alignItems: 'center', justifyContent: 'space-between' }}&gt;&#13;&#10;                &lt;Box style={{ flexDirection: 'row', alignItems: 'flex-start', gap: 14 }}&gt;&#13;&#10;                    &lt;Box style={{ width: 10, height: 10, background: '#1E4FA8', marginTop: 9 }} /&gt;&#13;&#10;                    &lt;Box&gt;&#13;&#10;                        &lt;Text style={{ fontSize: 21, fontWeight: 'bold', color: '#1A2230' }}&gt;一套业务逻辑，三种部署形态&lt;/Text&gt;&#13;&#10;                        &lt;Text style={{ fontSize: 16, color: '#4A5568', marginTop: 5, lineHeight: 1.5 }}&gt;&#13;&#10;                            单文件演示版 / 模块版 / Next 完整版，后端优先策略统一调度&#13;&#10;                        &lt;/Text&gt;&#13;&#10;                    &lt;/Box&gt;&#13;&#10;                &lt;/Box&gt;&#13;&#10;                &lt;Box style={{ background: '#E8EFF8', padding: '6px 14px', marginLeft: 16 }}&gt;&#13;&#10;                    &lt;Text style={{ fontSize: 14, color: '#1E4FA8', fontWeight: 'bold' }}&gt;部署形态&lt;/Text&gt;&#13;&#10;                &lt;/Box&gt;&#13;&#10;            &lt;/Box&gt;&#13;&#10;        &lt;/Box&gt;&#13;&#10;    &lt;/Box&gt;&#13;&#10;    {/* 右下：本章导语通栏 */}&#13;&#10;    &lt;Box style={{&#13;&#10;        position: 'absolute',&#13;&#10;        bottom: 0,&#13;&#10;        left: 460,&#13;&#10;        width: 820,&#13;&#10;        height: 150,&#13;&#10;        background: '#0E3F8C',&#13;&#10;        padding: '0 72px',&#13;&#10;        boxSizing: 'border-box',&#13;&#10;        flexDirection: 'row',&#13;&#10;        alignItems: 'center',&#13;&#10;        justifyContent: 'space-between',&#13;&#10;    }}&gt;&#13;&#10;        &lt;Box style={{ width: 520 }}&gt;&#13;&#10;            &lt;Text style={{ fontSize: 17, fontWeight: 'bold', color: '#FFFFFF' }}&gt;&#13;&#10;                本章回答&#13;&#10;            &lt;/Text&gt;&#13;&#10;            &lt;Text style={{ fontSize: 16, color: '#D7E3F5', marginTop: 6, lineHeight: 1.6 }}&gt;&#13;&#10;                这个作品解决什么问题、为什么这样架构——为第 2 章的算法论证建立问题语境。&#13;&#10;            &lt;/Text&gt;&#13;&#10;        &lt;/Box&gt;&#13;&#10;        &lt;Box style={{ width: 120, alignItems: 'center', gap: 6 }}&gt;&#13;&#10;            &lt;FAIcon name='compass' style={{ fill: '#FFFFFF', width: 30, height: 30 }} /&gt;&#13;&#10;            &lt;Text style={{ fontSize: 13, color: '#9FB9E4', letterSpacing: 1 }}&gt;&#13;&#10;                第 01 章 · 问题与方案&#13;&#10;            &lt;/Text&gt;&#13;&#10;        &lt;/Box&gt;&#13;&#10;    &lt;/Box&gt;&#13;&#10;&lt;/Slide&gt;&#13;&#10;"/>
+        <p:cNvPr id="318" name="" descr="&lt;Slide style={{&#13;&#10;    width: '1280px',&#13;&#10;    height: '720px',&#13;&#10;    background: '#FFFFFF',&#13;&#10;    padding: 0,&#13;&#10;    position: 'relative',&#13;&#10;    overflow: 'hidden',&#13;&#10;    fontFamily: &quot;'Noto Sans SC','Source Han Sans SC','PingFang SC','Microsoft YaHei',sans-serif&quot;,&#13;&#10;}}&gt;&#13;&#10;    {/* 左：藏蓝巨数字面板 */}&#13;&#10;    &lt;Box style={{&#13;&#10;        position: 'absolute',&#13;&#10;        top: 0,&#13;&#10;        left: 0,&#13;&#10;        width: 460,&#13;&#10;        height: 720,&#13;&#10;        background: '#0E3F8C',&#13;&#10;        justifyContent: 'center',&#13;&#10;        alignItems: 'center',&#13;&#10;    }}&gt;&#13;&#10;        &lt;Text style={{ fontSize: 15, color: '#9FB9E4', letterSpacing: 6, marginBottom: 8 }}&gt;&#13;&#10;            CHAPTER&#13;&#10;        &lt;/Text&gt;&#13;&#10;        &lt;Text style={{ fontSize: 210, fontWeight: 'bold', color: '#FFFFFF', opacity: 0.28, lineHeight: 1 }}&gt;&#13;&#10;            01&#13;&#10;        &lt;/Text&gt;&#13;&#10;    &lt;/Box&gt;&#13;&#10;    {/* 右上：章节页眉带 */}&#13;&#10;    &lt;Box style={{&#13;&#10;        position: 'absolute',&#13;&#10;        top: 0,&#13;&#10;        left: 460,&#13;&#10;        width: 820,&#13;&#10;        height: 236,&#13;&#10;        background: '#F7F9FC',&#13;&#10;        borderBottom: '1px solid #E5E7EB',&#13;&#10;        padding: '0 72px',&#13;&#10;        boxSizing: 'border-box',&#13;&#10;        flexDirection: 'row',&#13;&#10;        alignItems: 'center',&#13;&#10;        justifyContent: 'space-between',&#13;&#10;    }}&gt;&#13;&#10;        &lt;Box style={{ width: 470, height: 120, justifyContent: 'center' }}&gt;&#13;&#10;            &lt;Text style={{ fontSize: 15, color: '#3D7BD9', letterSpacing: 4, fontWeight: 'bold' }}&gt;&#13;&#10;                第 01 章&#13;&#10;            &lt;/Text&gt;&#13;&#10;            &lt;Text style={{ fontSize: 44, fontWeight: 'bold', color: '#0E3F8C', marginTop: 14 }}&gt;&#13;&#10;                问题与方案&#13;&#10;            &lt;/Text&gt;&#13;&#10;            &lt;Box style={{ width: 72, height: 4, background: '#FFC107', marginTop: 22 }} /&gt;&#13;&#10;        &lt;/Box&gt;&#13;&#10;        &lt;Box style={{ height: 100, background: '#E8EFF8', padding: '0 24px', alignItems: 'center', justifyContent: 'center' }}&gt;&#13;&#10;            &lt;Text style={{ fontSize: 46, fontWeight: 'bold', color: '#1E4FA8', lineHeight: 1 }}&gt;&#13;&#10;                P3–P5&#13;&#10;            &lt;/Text&gt;&#13;&#10;            &lt;Text style={{ fontSize: 13, color: '#4A5568', marginTop: 8, letterSpacing: 3 }}&gt;&#13;&#10;                本章范围&#13;&#10;            &lt;/Text&gt;&#13;&#10;        &lt;/Box&gt;&#13;&#10;    &lt;/Box&gt;&#13;&#10;    {/* 右中：要点卡 */}&#13;&#10;    &lt;Box style={{ position: 'absolute', top: 236, left: 460, width: 820, height: 334, padding: '28px 72px 0 72px', boxSizing: 'border-box' }}&gt;&#13;&#10;        &lt;Box style={{ flexDirection: 'column', gap: 18 }}&gt;&#13;&#10;            &lt;Box style={{ background: '#FFFFFF', border: '1px solid #D6DCE5', borderLeft: '4px solid #1E4FA8', padding: '14px 20px', flexDirection: 'row', alignItems: 'center', justifyContent: 'space-between' }}&gt;&#13;&#10;                &lt;Box style={{ flexDirection: 'row', alignItems: 'flex-start', gap: 14 }}&gt;&#13;&#10;                    &lt;Box style={{ width: 10, height: 10, background: '#1E4FA8', marginTop: 9 }} /&gt;&#13;&#10;                    &lt;Box&gt;&#13;&#10;                        &lt;Text style={{ fontSize: 21, fontWeight: 'bold', color: '#1A2230' }}&gt;三个真实痛点&lt;/Text&gt;&#13;&#10;                        &lt;Text style={{ fontSize: 16, color: '#4A5568', marginTop: 5, lineHeight: 1.5 }}&gt;&#13;&#10;                            练不了真面试 · 只给分数不解释 · 断网即废&#13;&#10;                        &lt;/Text&gt;&#13;&#10;                    &lt;/Box&gt;&#13;&#10;                &lt;/Box&gt;&#13;&#10;                &lt;Box style={{ background: '#E8EFF8', padding: '6px 14px', marginLeft: 16 }}&gt;&#13;&#10;                    &lt;Text style={{ fontSize: 14, color: '#1E4FA8', fontWeight: 'bold' }}&gt;为什么做&lt;/Text&gt;&#13;&#10;                &lt;/Box&gt;&#13;&#10;            &lt;/Box&gt;&#13;&#10;            &lt;Box style={{ background: '#FFFFFF', border: '1px solid #D6DCE5', borderLeft: '4px solid #1E4FA8', padding: '14px 20px', flexDirection: 'row', alignItems: 'center', justifyContent: 'space-between' }}&gt;&#13;&#10;                &lt;Box style={{ flexDirection: 'row', alignItems: 'flex-start', gap: 14 }}&gt;&#13;&#10;                    &lt;Box style={{ width: 10, height: 10, background: '#1E4FA8', marginTop: 9 }} /&gt;&#13;&#10;                    &lt;Box&gt;&#13;&#10;                        &lt;Text style={{ fontSize: 21, fontWeight: 'bold', color: '#1A2230' }}&gt;对应的设计决策&lt;/Text&gt;&#13;&#10;                        &lt;Text style={{ fontSize: 16, color: '#4A5568', marginTop: 5, lineHeight: 1.5 }}&gt;&#13;&#10;                            五 Agent 圆桌按回答内容派发 · 每条评分引用原话 · 三级降级保底&#13;&#10;                        &lt;/Text&gt;&#13;&#10;                    &lt;/Box&gt;&#13;&#10;                &lt;/Box&gt;&#13;&#10;                &lt;Box style={{ background: '#E8EFF8', padding: '6px 14px', marginLeft: 16 }}&gt;&#13;&#10;                    &lt;Text style={{ fontSize: 14, color: '#1E4FA8', fontWeight: 'bold' }}&gt;如何解&lt;/Text&gt;&#13;&#10;                &lt;/Box&gt;&#13;&#10;            &lt;/Box&gt;&#13;&#10;            &lt;Box style={{ background: '#FFFFFF', border: '1px solid #D6DCE5', borderLeft: '4px solid #1E4FA8', padding: '14px 20px', flexDirection: 'row', alignItems: 'center', justifyContent: 'space-between' }}&gt;&#13;&#10;                &lt;Box style={{ flexDirection: 'row', alignItems: 'flex-start', gap: 14 }}&gt;&#13;&#10;                    &lt;Box style={{ width: 10, height: 10, background: '#1E4FA8', marginTop: 9 }} /&gt;&#13;&#10;                    &lt;Box&gt;&#13;&#10;                        &lt;Text style={{ fontSize: 21, fontWeight: 'bold', color: '#1A2230' }}&gt;一套业务逻辑，三种部署形态&lt;/Text&gt;&#13;&#10;                        &lt;Text style={{ fontSize: 16, color: '#4A5568', marginTop: 5, lineHeight: 1.5 }}&gt;&#13;&#10;                            单文件演示版 / 模块版 / FastAPI 服务端，后端优先策略统一调度&#13;&#10;                        &lt;/Text&gt;&#13;&#10;                    &lt;/Box&gt;&#13;&#10;                &lt;/Box&gt;&#13;&#10;                &lt;Box style={{ background: '#E8EFF8', padding: '6px 14px', marginLeft: 16 }}&gt;&#13;&#10;                    &lt;Text style={{ fontSize: 14, color: '#1E4FA8', fontWeight: 'bold' }}&gt;部署形态&lt;/Text&gt;&#13;&#10;                &lt;/Box&gt;&#13;&#10;            &lt;/Box&gt;&#13;&#10;        &lt;/Box&gt;&#13;&#10;    &lt;/Box&gt;&#13;&#10;    {/* 右下：本章导语通栏 */}&#13;&#10;    &lt;Box style={{&#13;&#10;        position: 'absolute',&#13;&#10;        bottom: 0,&#13;&#10;        left: 460,&#13;&#10;        width: 820,&#13;&#10;        height: 150,&#13;&#10;        background: '#0E3F8C',&#13;&#10;        padding: '0 72px',&#13;&#10;        boxSizing: 'border-box',&#13;&#10;        flexDirection: 'row',&#13;&#10;        alignItems: 'center',&#13;&#10;        justifyContent: 'space-between',&#13;&#10;    }}&gt;&#13;&#10;        &lt;Box style={{ width: 520 }}&gt;&#13;&#10;            &lt;Text style={{ fontSize: 17, fontWeight: 'bold', color: '#FFFFFF' }}&gt;&#13;&#10;                本章回答&#13;&#10;            &lt;/Text&gt;&#13;&#10;            &lt;Text style={{ fontSize: 16, color: '#D7E3F5', marginTop: 6, lineHeight: 1.6 }}&gt;&#13;&#10;                这个作品解决什么问题、为什么这样架构——为第 2 章的算法论证建立问题语境。&#13;&#10;            &lt;/Text&gt;&#13;&#10;        &lt;/Box&gt;&#13;&#10;        &lt;Box style={{ width: 120, alignItems: 'center', gap: 6 }}&gt;&#13;&#10;            &lt;FAIcon name='compass' style={{ fill: '#FFFFFF', width: 30, height: 30 }} /&gt;&#13;&#10;            &lt;Text style={{ fontSize: 13, color: '#9FB9E4', letterSpacing: 1 }}&gt;&#13;&#10;                第 01 章 · 问题与方案&#13;&#10;            &lt;/Text&gt;&#13;&#10;        &lt;/Box&gt;&#13;&#10;    &lt;/Box&gt;&#13;&#10;&lt;/Slide&gt;&#13;&#10;"/>
         <p:cNvGrpSpPr/>
         <p:nvPr/>
       </p:nvGrpSpPr>
@@ -16903,7 +16903,7 @@
                 <a:latin typeface="Noto Sans SC"/>
                 <a:ea typeface="Noto Sans SC"/>
               </a:rPr>
-              <a:t xml:space="preserve"> / Next </a:t>
+              <a:t xml:space="preserve"> / FastAPI </a:t>
             </a:r>
             <a:r>
               <a:rPr lang="zh-CN" sz="1200">
@@ -16913,7 +16913,7 @@
                 <a:latin typeface="Noto Sans SC"/>
                 <a:ea typeface="Noto Sans SC"/>
               </a:rPr>
-              <a:t>完整版，后端优先策略统一调度</a:t>
+              <a:t>服务端，后端优先策略统一调度</a:t>
             </a:r>
             <a:endParaRPr/>
           </a:p>

--- a/docs/FutureMirror答辩.pptx
+++ b/docs/FutureMirror答辩.pptx
@@ -9695,7 +9695,7 @@
   <p:cSld>
     <p:spTree>
       <p:nvGrpSpPr>
-        <p:cNvPr id="174" name="" descr="&lt;Slide style={{&#10;    width: '1280px',&#10;    height: '720px',&#10;    background: '#FFFFFF',&#10;    padding: 0,&#10;    position: 'relative',&#10;    overflow: 'hidden',&#10;    fontFamily: &quot;'Noto Sans SC','Source Han Sans SC','PingFang SC','Microsoft YaHei',sans-serif&quot;,&#10;}}&gt;&#10;    {/* ===== 母版：A3 深蓝顶条 ===== */}&#10;    &lt;Box style={{ position: 'absolute', top: 0, left: 0, width: '1280px', height: 84, background: '#0E3F8C' }}&gt;&#10;        &lt;svg style={{ position: 'absolute', right: 210, top: 18, opacity: 0.16 }} width={150} height={48} viewBox='0 0 150 48'&gt;&#10;            &lt;g stroke='#FFFFFF' strokeWidth='1.2' fill='none'&gt;&#10;                &lt;path d='M2 24 L28 24 L38 10 L74 10 L84 24 L120 24 L130 38 L148 38' /&gt;&#10;                &lt;path d='M38 10 L38 38 L74 38' /&gt;&#10;                &lt;circle cx='28' cy='24' r='3' fill='#FFFFFF' /&gt;&#10;                &lt;circle cx='84' cy='24' r='3' fill='#FFFFFF' /&gt;&#10;            &lt;/g&gt;&#10;        &lt;/svg&gt;&#10;        &lt;Box style={{ position: 'absolute', left: 40, top: 0, height: 84, justifyContent: 'center' }}&gt;&#10;            &lt;Text style={{ fontSize: 26, fontWeight: 'bold', color: '#FFFFFF' }}&gt;&#10;                工程质量：全量回归 + 四渠道发布流水线&#10;            &lt;/Text&gt;&#10;        &lt;/Box&gt;&#10;        &lt;Box style={{ position: 'absolute', right: 40, top: 24, background: '#1E4FA8', padding: '7px 16px', borderRadius: 14 }}&gt;&#10;            &lt;Text style={{ fontSize: 14, color: '#FFFFFF', letterSpacing: 1 }}&gt;&#10;                03 真实完成度&#10;            &lt;/Text&gt;&#10;        &lt;/Box&gt;&#10;    &lt;/Box&gt;&#10;    {/* ===== 左侧标题栏 ===== */}&#10;    &lt;Box style={{ position: 'absolute', top: 84, left: 0, width: 356, height: 572, background: '#0E3F8C', padding: '30px 32px 26px 40px', boxSizing: 'border-box', flexDirection: 'column' }}&gt;&#10;        &lt;Text style={{ fontSize: 14, color: '#9FB9E4', letterSpacing: 4 }}&gt;&#10;            测试与发布&#10;        &lt;/Text&gt;&#10;        &lt;Text style={{ fontSize: 30, fontWeight: 'bold', color: '#FFFFFF', marginTop: 14, lineHeight: 1.35 }}&gt;&#10;            全量回归纪律&#10;        &lt;/Text&gt;&#10;        &lt;Box style={{ width: 48, height: 4, background: '#FFC107', marginTop: 18 }} /&gt;&#10;        &lt;Text style={{ fontSize: 15, color: '#D7E3F5', lineHeight: 1.85, marginTop: 18 }}&gt;&#10;            每次改动必须全绿才提交——测试不是演示后的补丁，而是改动发生时的第一道闸门。能复现的工程纪律，是「团队可完整解释全部代码」的底座。&#10;        &lt;/Text&gt;&#10;        &lt;Box style={{ flex: 1 }} /&gt;&#10;        &lt;Box style={{ background: '#1E4FA8', padding: '14px 16px' }}&gt;&#10;            &lt;Text style={{ fontSize: 15, fontWeight: 'bold', color: '#FFFFFF' }}&gt;&#10;                发布链&#10;            &lt;/Text&gt;&#10;            &lt;Text style={{ fontSize: 14, color: '#D7E3F5', marginTop: 6, lineHeight: 1.6 }}&gt;&#10;                repo → Pages → 镜像 → Release&lt;br /&gt;每次变更后逐一核验&#10;            &lt;/Text&gt;&#10;        &lt;/Box&gt;&#10;    &lt;/Box&gt;&#10;    {/* ===== 右侧测试矩阵 + 发布链 ===== */}&#10;    &lt;Box style={{ position: 'absolute', top: 84, left: 356, width: 924, height: 572, padding: '24px 36px', boxSizing: 'border-box' }}&gt;&#10;        &lt;Text style={{ fontSize: 16, fontWeight: 'bold', color: '#0E3F8C', letterSpacing: 1 }}&gt;&#10;            测试矩阵（全部可当场重跑）&#10;        &lt;/Text&gt;&#10;        &lt;Box style={{ marginTop: 12, height: 252 }}&gt;&#10;            &lt;Table&#10;                style={{ width: '100%', height: 252 }}&#10;                defaultTextStyle={{ fontSize: 13.5, textAlign: 'center', color: '#1A2230' }}&#10;                defaultCellStyle={{&#10;                    border: {&#10;                        left: { width: 1, color: '#D6DCE5' },&#10;                        right: { width: 1, color: '#D6DCE5' },&#10;                        top: { width: 1, color: '#D6DCE5' },&#10;                        bottom: { width: 1, color: '#D6DCE5' },&#10;                    },&#10;                }}&#10;                cells={[&#10;                    [&#10;                        { text: '层', textStyle: { bold: true, color: '#FFFFFF' }, cellStyle: { background: { color: '#0E3F8C' } } },&#10;                        { text: '规模', textStyle: { bold: true, color: '#FFFFFF' }, cellStyle: { background: { color: '#0E3F8C' } } },&#10;                        { text: '覆盖内容', textStyle: { bold: true, color: '#FFFFFF' }, cellStyle: { background: { color: '#0E3F8C' } } },&#10;                    ],&#10;                    [&#10;                        { text: '前端', textStyle: { bold: true, color: '#0E3F8C' } },&#10;                        { text: '19 套 · 1427 断言', textStyle: { bold: true, color: '#1E4FA8' } },&#10;                        { text: 'jsdom 端到端（含 RAG 重排专项 9 条）' },&#10;                    ],&#10;                    [&#10;                        { text: '后端', textStyle: { bold: true, color: '#0E3F8C' }, cellStyle: { background: { color: '#F7F9FC' } } },&#10;                        { text: '27 项 pytest', textStyle: { bold: true, color: '#1E4FA8' }, cellStyle: { background: { color: '#F7F9FC' } } },&#10;                        { text: '含评分校准不变量 11 条（单调性 / 维度分离 / 确定性）', cellStyle: { background: { color: '#F7F9FC' } } },&#10;                    ],&#10;                    [&#10;                        { text: '单元', textStyle: { bold: true, color: '#0E3F8C' } },&#10;                        { text: '217 项 Node', textStyle: { bold: true, color: '#1E4FA8' } },&#10;                        { text: 'store / 用户系统 / 简历 / 报告逻辑' },&#10;                    ],&#10;                    [&#10;                        { text: '对拍', textStyle: { bold: true, color: '#0E3F8C' }, cellStyle: { background: { color: '#F7F9FC' } } },&#10;                        { text: '5/5 一致', textStyle: { bold: true, color: '#1E4FA8' }, cellStyle: { background: { color: '#F7F9FC' } } },&#10;                        { text: '双引擎评分共用同一份标准样本逐维度比对', cellStyle: { background: { color: '#F7F9FC' } } },&#10;                    ],&#10;                    [&#10;                        { text: '类型', textStyle: { bold: true, color: '#0E3F8C' } },&#10;                        { text: '静态校验', textStyle: { bold: true, color: '#1E4FA8' } },&#10;                        { text: 'JS 语法 / DOM id / 标签配平' },&#10;                    ],&#10;                ]}&#10;            /&gt;&#10;        &lt;/Box&gt;&#10;        {/* 发布链节点串 */}&#10;        &lt;Text style={{ fontSize: 16, fontWeight: 'bold', color: '#0E3F8C', letterSpacing: 1, marginTop: 20 }}&gt;&#10;            四渠道发布流水线&#10;        &lt;/Text&gt;&#10;        &lt;Box style={{ flexDirection: 'row', alignItems: 'center', gap: 10, marginTop: 12 }}&gt;&#10;            &lt;Box style={{ flex: 1, background: '#E8EFF8', border: '1px solid #C9D8F0', padding: '12px 8px', alignItems: 'center' }}&gt;&#10;                &lt;Text style={{ fontSize: 15, fontWeight: 'bold', color: '#0E3F8C' }}&gt;repo (main)&lt;/Text&gt;&#10;                &lt;Text style={{ fontSize: 12, color: '#4A5568', marginTop: 3 }}&gt;代码与文档单一事实源&lt;/Text&gt;&#10;            &lt;/Box&gt;&#10;            &lt;FAIcon name='arrow-right' style={{ fill: '#1E4FA8', width: 20, height: 20 }} /&gt;&#10;            &lt;Box style={{ flex: 1, background: '#E8EFF8', border: '1px solid #C9D8F0', padding: '12px 8px', alignItems: 'center' }}&gt;&#10;                &lt;Text style={{ fontSize: 15, fontWeight: 'bold', color: '#0E3F8C' }}&gt;GitHub Pages&lt;/Text&gt;&#10;                &lt;Text style={{ fontSize: 12, color: '#4A5568', marginTop: 3 }}&gt;海外演示入口&lt;/Text&gt;&#10;            &lt;/Box&gt;&#10;            &lt;FAIcon name='arrow-right' style={{ fill: '#1E4FA8', width: 20, height: 20 }} /&gt;&#10;            &lt;Box style={{ flex: 1, background: '#E8EFF8', border: '1px solid #C9D8F0', padding: '12px 8px', alignItems: 'center' }}&gt;&#10;                &lt;Text style={{ fontSize: 15, fontWeight: 'bold', color: '#0E3F8C' }}&gt;国内镜像&lt;/Text&gt;&#10;                &lt;Text style={{ fontSize: 12, color: '#4A5568', marginTop: 3 }}&gt;同源后端 · 赛场直连&lt;/Text&gt;&#10;            &lt;/Box&gt;&#10;            &lt;FAIcon name='arrow-right' style={{ fill: '#1E4FA8', width: 20, height: 20 }} /&gt;&#10;            &lt;Box style={{ flex: 1, background: '#E8EFF8', border: '1px solid #C9D8F0', padding: '12px 8px', alignItems: 'center' }}&gt;&#10;                &lt;Text style={{ fontSize: 15, fontWeight: 'bold', color: '#0E3F8C' }}&gt;Release 附件&lt;/Text&gt;&#10;                &lt;Text style={{ fontSize: 12, color: '#4A5568', marginTop: 3 }}&gt;demo / 文档 / PDF / 日志&lt;/Text&gt;&#10;            &lt;/Box&gt;&#10;        &lt;/Box&gt;&#10;    &lt;/Box&gt;&#10;    {/* ===== 母版：页脚 ===== */}&#10;    &lt;Box style={{ position: 'absolute', bottom: 0, left: 0, width: '1280px', height: 64, borderTop: '1px solid #E5E7EB', flexDirection: 'row', alignItems: 'center', justifyContent: 'space-between', padding: '0 40px', boxSizing: 'border-box' }}&gt;&#10;        &lt;Text style={{ fontSize: 13, color: '#8B97A8' }}&gt;&#10;            面镜 FutureMirror · 竞赛答辩&#10;        &lt;/Text&gt;&#10;        &lt;Text style={{ fontSize: 14, color: '#1E4FA8', fontWeight: 'bold' }}&gt;&#10;            14 / 16&#10;        &lt;/Text&gt;&#10;    &lt;/Box&gt;&#10;&lt;/Slide&gt;&#10;"/>
+        <p:cNvPr id="174" name="" descr="&lt;Slide style={{&#10;    width: '1280px',&#10;    height: '720px',&#10;    background: '#FFFFFF',&#10;    padding: 0,&#10;    position: 'relative',&#10;    overflow: 'hidden',&#10;    fontFamily: &quot;'Noto Sans SC','Source Han Sans SC','PingFang SC','Microsoft YaHei',sans-serif&quot;,&#10;}}&gt;&#10;    {/* ===== 母版：A3 深蓝顶条 ===== */}&#10;    &lt;Box style={{ position: 'absolute', top: 0, left: 0, width: '1280px', height: 84, background: '#0E3F8C' }}&gt;&#10;        &lt;svg style={{ position: 'absolute', right: 210, top: 18, opacity: 0.16 }} width={150} height={48} viewBox='0 0 150 48'&gt;&#10;            &lt;g stroke='#FFFFFF' strokeWidth='1.2' fill='none'&gt;&#10;                &lt;path d='M2 24 L28 24 L38 10 L74 10 L84 24 L120 24 L130 38 L148 38' /&gt;&#10;                &lt;path d='M38 10 L38 38 L74 38' /&gt;&#10;                &lt;circle cx='28' cy='24' r='3' fill='#FFFFFF' /&gt;&#10;                &lt;circle cx='84' cy='24' r='3' fill='#FFFFFF' /&gt;&#10;            &lt;/g&gt;&#10;        &lt;/svg&gt;&#10;        &lt;Box style={{ position: 'absolute', left: 40, top: 0, height: 84, justifyContent: 'center' }}&gt;&#10;            &lt;Text style={{ fontSize: 26, fontWeight: 'bold', color: '#FFFFFF' }}&gt;&#10;                工程质量：全量回归 + 四渠道发布流水线&#10;            &lt;/Text&gt;&#10;        &lt;/Box&gt;&#10;        &lt;Box style={{ position: 'absolute', right: 40, top: 24, background: '#1E4FA8', padding: '7px 16px', borderRadius: 14 }}&gt;&#10;            &lt;Text style={{ fontSize: 14, color: '#FFFFFF', letterSpacing: 1 }}&gt;&#10;                03 真实完成度&#10;            &lt;/Text&gt;&#10;        &lt;/Box&gt;&#10;    &lt;/Box&gt;&#10;    {/* ===== 左侧标题栏 ===== */}&#10;    &lt;Box style={{ position: 'absolute', top: 84, left: 0, width: 356, height: 572, background: '#0E3F8C', padding: '30px 32px 26px 40px', boxSizing: 'border-box', flexDirection: 'column' }}&gt;&#10;        &lt;Text style={{ fontSize: 14, color: '#9FB9E4', letterSpacing: 4 }}&gt;&#10;            测试与发布&#10;        &lt;/Text&gt;&#10;        &lt;Text style={{ fontSize: 30, fontWeight: 'bold', color: '#FFFFFF', marginTop: 14, lineHeight: 1.35 }}&gt;&#10;            全量回归纪律&#10;        &lt;/Text&gt;&#10;        &lt;Box style={{ width: 48, height: 4, background: '#FFC107', marginTop: 18 }} /&gt;&#10;        &lt;Text style={{ fontSize: 15, color: '#D7E3F5', lineHeight: 1.85, marginTop: 18 }}&gt;&#10;            每次改动必须全绿才提交——测试不是演示后的补丁，而是改动发生时的第一道闸门。能复现的工程纪律，是「团队可完整解释全部代码」的底座。&#10;        &lt;/Text&gt;&#10;        &lt;Box style={{ flex: 1 }} /&gt;&#10;        &lt;Box style={{ background: '#1E4FA8', padding: '14px 16px' }}&gt;&#10;            &lt;Text style={{ fontSize: 15, fontWeight: 'bold', color: '#FFFFFF' }}&gt;&#10;                发布链&#10;            &lt;/Text&gt;&#10;            &lt;Text style={{ fontSize: 14, color: '#D7E3F5', marginTop: 6, lineHeight: 1.6 }}&gt;&#10;                repo → Pages → 镜像 → Release&lt;br /&gt;每次变更后逐一核验&#10;            &lt;/Text&gt;&#10;        &lt;/Box&gt;&#10;    &lt;/Box&gt;&#10;    {/* ===== 右侧测试矩阵 + 发布链 ===== */}&#10;    &lt;Box style={{ position: 'absolute', top: 84, left: 356, width: 924, height: 572, padding: '24px 36px', boxSizing: 'border-box' }}&gt;&#10;        &lt;Text style={{ fontSize: 16, fontWeight: 'bold', color: '#0E3F8C', letterSpacing: 1 }}&gt;&#10;            测试矩阵（全部可当场重跑）&#10;        &lt;/Text&gt;&#10;        &lt;Box style={{ marginTop: 12, height: 252 }}&gt;&#10;            &lt;Table&#10;                style={{ width: '100%', height: 252 }}&#10;                defaultTextStyle={{ fontSize: 13.5, textAlign: 'center', color: '#1A2230' }}&#10;                defaultCellStyle={{&#10;                    border: {&#10;                        left: { width: 1, color: '#D6DCE5' },&#10;                        right: { width: 1, color: '#D6DCE5' },&#10;                        top: { width: 1, color: '#D6DCE5' },&#10;                        bottom: { width: 1, color: '#D6DCE5' },&#10;                    },&#10;                }}&#10;                cells={[&#10;                    [&#10;                        { text: '层', textStyle: { bold: true, color: '#FFFFFF' }, cellStyle: { background: { color: '#0E3F8C' } } },&#10;                        { text: '规模', textStyle: { bold: true, color: '#FFFFFF' }, cellStyle: { background: { color: '#0E3F8C' } } },&#10;                        { text: '覆盖内容', textStyle: { bold: true, color: '#FFFFFF' }, cellStyle: { background: { color: '#0E3F8C' } } },&#10;                    ],&#10;                    [&#10;                        { text: '前端', textStyle: { bold: true, color: '#0E3F8C' } },&#10;                        { text: '19 套 · 1427 断言', textStyle: { bold: true, color: '#1E4FA8' } },&#10;                        { text: 'jsdom 端到端（含 RAG 重排专项 9 条）' },&#10;                    ],&#10;                    [&#10;                        { text: '后端', textStyle: { bold: true, color: '#0E3F8C' }, cellStyle: { background: { color: '#F7F9FC' } } },&#10;                        { text: '27 项 pytest', textStyle: { bold: true, color: '#1E4FA8' }, cellStyle: { background: { color: '#F7F9FC' } } },&#10;                        { text: '含评分校准不变量 11 条（单调性 / 维度分离 / 确定性）', cellStyle: { background: { color: '#F7F9FC' } } },&#10;                    ],&#10;                    [&#10;                        { text: '单元', textStyle: { bold: true, color: '#0E3F8C' } },&#10;                        { text: '217 项 Node', textStyle: { bold: true, color: '#1E4FA8' } },&#10;                        { text: 'store / 用户系统 / 简历 / 报告逻辑' },&#10;                    ],&#10;                    [&#10;                        { text: '对拍', textStyle: { bold: true, color: '#0E3F8C' }, cellStyle: { background: { color: '#F7F9FC' } } },&#10;                        { text: '5/5 一致', textStyle: { bold: true, color: '#1E4FA8' }, cellStyle: { background: { color: '#F7F9FC' } } },&#10;                        { text: '双引擎评分共用同一份标准样本逐维度比对', cellStyle: { background: { color: '#F7F9FC' } } },&#10;                    ],&#10;                    [&#10;                        { text: '规范', textStyle: { bold: true, color: '#0E3F8C' } },&#10;                        { text: 'lint + 类型', textStyle: { bold: true, color: '#1E4FA8' } },&#10;                        { text: 'ESLint 0 error · Prettier 全绿 · JSDoc' },&#10;                    ],&#10;                ]}&#10;            /&gt;&#10;        &lt;/Box&gt;&#10;        {/* 发布链节点串 */}&#10;        &lt;Text style={{ fontSize: 16, fontWeight: 'bold', color: '#0E3F8C', letterSpacing: 1, marginTop: 20 }}&gt;&#10;            四渠道发布流水线&#10;        &lt;/Text&gt;&#10;        &lt;Box style={{ flexDirection: 'row', alignItems: 'center', gap: 10, marginTop: 12 }}&gt;&#10;            &lt;Box style={{ flex: 1, background: '#E8EFF8', border: '1px solid #C9D8F0', padding: '12px 8px', alignItems: 'center' }}&gt;&#10;                &lt;Text style={{ fontSize: 15, fontWeight: 'bold', color: '#0E3F8C' }}&gt;repo (main)&lt;/Text&gt;&#10;                &lt;Text style={{ fontSize: 12, color: '#4A5568', marginTop: 3 }}&gt;代码与文档单一事实源&lt;/Text&gt;&#10;            &lt;/Box&gt;&#10;            &lt;FAIcon name='arrow-right' style={{ fill: '#1E4FA8', width: 20, height: 20 }} /&gt;&#10;            &lt;Box style={{ flex: 1, background: '#E8EFF8', border: '1px solid #C9D8F0', padding: '12px 8px', alignItems: 'center' }}&gt;&#10;                &lt;Text style={{ fontSize: 15, fontWeight: 'bold', color: '#0E3F8C' }}&gt;GitHub Pages&lt;/Text&gt;&#10;                &lt;Text style={{ fontSize: 12, color: '#4A5568', marginTop: 3 }}&gt;海外演示入口&lt;/Text&gt;&#10;            &lt;/Box&gt;&#10;            &lt;FAIcon name='arrow-right' style={{ fill: '#1E4FA8', width: 20, height: 20 }} /&gt;&#10;            &lt;Box style={{ flex: 1, background: '#E8EFF8', border: '1px solid #C9D8F0', padding: '12px 8px', alignItems: 'center' }}&gt;&#10;                &lt;Text style={{ fontSize: 15, fontWeight: 'bold', color: '#0E3F8C' }}&gt;国内镜像&lt;/Text&gt;&#10;                &lt;Text style={{ fontSize: 12, color: '#4A5568', marginTop: 3 }}&gt;同源后端 · 赛场直连&lt;/Text&gt;&#10;            &lt;/Box&gt;&#10;            &lt;FAIcon name='arrow-right' style={{ fill: '#1E4FA8', width: 20, height: 20 }} /&gt;&#10;            &lt;Box style={{ flex: 1, background: '#E8EFF8', border: '1px solid #C9D8F0', padding: '12px 8px', alignItems: 'center' }}&gt;&#10;                &lt;Text style={{ fontSize: 15, fontWeight: 'bold', color: '#0E3F8C' }}&gt;Release 附件&lt;/Text&gt;&#10;                &lt;Text style={{ fontSize: 12, color: '#4A5568', marginTop: 3 }}&gt;demo / 文档 / PDF / 日志&lt;/Text&gt;&#10;            &lt;/Box&gt;&#10;        &lt;/Box&gt;&#10;    &lt;/Box&gt;&#10;    {/* ===== 母版：页脚 ===== */}&#10;    &lt;Box style={{ position: 'absolute', bottom: 0, left: 0, width: '1280px', height: 64, borderTop: '1px solid #E5E7EB', flexDirection: 'row', alignItems: 'center', justifyContent: 'space-between', padding: '0 40px', boxSizing: 'border-box' }}&gt;&#10;        &lt;Text style={{ fontSize: 13, color: '#8B97A8' }}&gt;&#10;            面镜 FutureMirror · 竞赛答辩&#10;        &lt;/Text&gt;&#10;        &lt;Text style={{ fontSize: 14, color: '#1E4FA8', fontWeight: 'bold' }}&gt;&#10;            14 / 16&#10;        &lt;/Text&gt;&#10;    &lt;/Box&gt;&#10;&lt;/Slide&gt;&#10;"/>
         <p:cNvGrpSpPr/>
         <p:nvPr/>
       </p:nvGrpSpPr>
@@ -10938,7 +10938,7 @@
                           <a:latin typeface="Microsoft YaHei"/>
                           <a:ea typeface="Microsoft YaHei"/>
                         </a:rPr>
-                        <a:t>类型</a:t>
+                        <a:t>规范</a:t>
                       </a:r>
                       <a:endParaRPr/>
                     </a:p>
@@ -10977,7 +10977,7 @@
                           <a:latin typeface="Microsoft YaHei"/>
                           <a:ea typeface="Microsoft YaHei"/>
                         </a:rPr>
-                        <a:t>静态校验</a:t>
+                        <a:t>lint + 类型</a:t>
                       </a:r>
                       <a:endParaRPr/>
                     </a:p>
@@ -11016,7 +11016,7 @@
                           <a:latin typeface="Microsoft YaHei"/>
                           <a:ea typeface="Microsoft YaHei"/>
                         </a:rPr>
-                        <a:t>JS 语法 / DOM id / 标签配平</a:t>
+                        <a:t>ESLint 0 error · Prettier 全绿 · JSDoc</a:t>
                       </a:r>
                       <a:endParaRPr/>
                     </a:p>

--- a/docs/FutureMirror答辩.pptx
+++ b/docs/FutureMirror答辩.pptx
@@ -9695,7 +9695,7 @@
   <p:cSld>
     <p:spTree>
       <p:nvGrpSpPr>
-        <p:cNvPr id="174" name="" descr="&lt;Slide style={{&#10;    width: '1280px',&#10;    height: '720px',&#10;    background: '#FFFFFF',&#10;    padding: 0,&#10;    position: 'relative',&#10;    overflow: 'hidden',&#10;    fontFamily: &quot;'Noto Sans SC','Source Han Sans SC','PingFang SC','Microsoft YaHei',sans-serif&quot;,&#10;}}&gt;&#10;    {/* ===== 母版：A3 深蓝顶条 ===== */}&#10;    &lt;Box style={{ position: 'absolute', top: 0, left: 0, width: '1280px', height: 84, background: '#0E3F8C' }}&gt;&#10;        &lt;svg style={{ position: 'absolute', right: 210, top: 18, opacity: 0.16 }} width={150} height={48} viewBox='0 0 150 48'&gt;&#10;            &lt;g stroke='#FFFFFF' strokeWidth='1.2' fill='none'&gt;&#10;                &lt;path d='M2 24 L28 24 L38 10 L74 10 L84 24 L120 24 L130 38 L148 38' /&gt;&#10;                &lt;path d='M38 10 L38 38 L74 38' /&gt;&#10;                &lt;circle cx='28' cy='24' r='3' fill='#FFFFFF' /&gt;&#10;                &lt;circle cx='84' cy='24' r='3' fill='#FFFFFF' /&gt;&#10;            &lt;/g&gt;&#10;        &lt;/svg&gt;&#10;        &lt;Box style={{ position: 'absolute', left: 40, top: 0, height: 84, justifyContent: 'center' }}&gt;&#10;            &lt;Text style={{ fontSize: 26, fontWeight: 'bold', color: '#FFFFFF' }}&gt;&#10;                工程质量：全量回归 + 四渠道发布流水线&#10;            &lt;/Text&gt;&#10;        &lt;/Box&gt;&#10;        &lt;Box style={{ position: 'absolute', right: 40, top: 24, background: '#1E4FA8', padding: '7px 16px', borderRadius: 14 }}&gt;&#10;            &lt;Text style={{ fontSize: 14, color: '#FFFFFF', letterSpacing: 1 }}&gt;&#10;                03 真实完成度&#10;            &lt;/Text&gt;&#10;        &lt;/Box&gt;&#10;    &lt;/Box&gt;&#10;    {/* ===== 左侧标题栏 ===== */}&#10;    &lt;Box style={{ position: 'absolute', top: 84, left: 0, width: 356, height: 572, background: '#0E3F8C', padding: '30px 32px 26px 40px', boxSizing: 'border-box', flexDirection: 'column' }}&gt;&#10;        &lt;Text style={{ fontSize: 14, color: '#9FB9E4', letterSpacing: 4 }}&gt;&#10;            测试与发布&#10;        &lt;/Text&gt;&#10;        &lt;Text style={{ fontSize: 30, fontWeight: 'bold', color: '#FFFFFF', marginTop: 14, lineHeight: 1.35 }}&gt;&#10;            全量回归纪律&#10;        &lt;/Text&gt;&#10;        &lt;Box style={{ width: 48, height: 4, background: '#FFC107', marginTop: 18 }} /&gt;&#10;        &lt;Text style={{ fontSize: 15, color: '#D7E3F5', lineHeight: 1.85, marginTop: 18 }}&gt;&#10;            每次改动必须全绿才提交——测试不是演示后的补丁，而是改动发生时的第一道闸门。能复现的工程纪律，是「团队可完整解释全部代码」的底座。&#10;        &lt;/Text&gt;&#10;        &lt;Box style={{ flex: 1 }} /&gt;&#10;        &lt;Box style={{ background: '#1E4FA8', padding: '14px 16px' }}&gt;&#10;            &lt;Text style={{ fontSize: 15, fontWeight: 'bold', color: '#FFFFFF' }}&gt;&#10;                发布链&#10;            &lt;/Text&gt;&#10;            &lt;Text style={{ fontSize: 14, color: '#D7E3F5', marginTop: 6, lineHeight: 1.6 }}&gt;&#10;                repo → Pages → 镜像 → Release&lt;br /&gt;每次变更后逐一核验&#10;            &lt;/Text&gt;&#10;        &lt;/Box&gt;&#10;    &lt;/Box&gt;&#10;    {/* ===== 右侧测试矩阵 + 发布链 ===== */}&#10;    &lt;Box style={{ position: 'absolute', top: 84, left: 356, width: 924, height: 572, padding: '24px 36px', boxSizing: 'border-box' }}&gt;&#10;        &lt;Text style={{ fontSize: 16, fontWeight: 'bold', color: '#0E3F8C', letterSpacing: 1 }}&gt;&#10;            测试矩阵（全部可当场重跑）&#10;        &lt;/Text&gt;&#10;        &lt;Box style={{ marginTop: 12, height: 252 }}&gt;&#10;            &lt;Table&#10;                style={{ width: '100%', height: 252 }}&#10;                defaultTextStyle={{ fontSize: 13.5, textAlign: 'center', color: '#1A2230' }}&#10;                defaultCellStyle={{&#10;                    border: {&#10;                        left: { width: 1, color: '#D6DCE5' },&#10;                        right: { width: 1, color: '#D6DCE5' },&#10;                        top: { width: 1, color: '#D6DCE5' },&#10;                        bottom: { width: 1, color: '#D6DCE5' },&#10;                    },&#10;                }}&#10;                cells={[&#10;                    [&#10;                        { text: '层', textStyle: { bold: true, color: '#FFFFFF' }, cellStyle: { background: { color: '#0E3F8C' } } },&#10;                        { text: '规模', textStyle: { bold: true, color: '#FFFFFF' }, cellStyle: { background: { color: '#0E3F8C' } } },&#10;                        { text: '覆盖内容', textStyle: { bold: true, color: '#FFFFFF' }, cellStyle: { background: { color: '#0E3F8C' } } },&#10;                    ],&#10;                    [&#10;                        { text: '前端', textStyle: { bold: true, color: '#0E3F8C' } },&#10;                        { text: '19 套 · 1427 断言', textStyle: { bold: true, color: '#1E4FA8' } },&#10;                        { text: 'jsdom 端到端（含 RAG 重排专项 9 条）' },&#10;                    ],&#10;                    [&#10;                        { text: '后端', textStyle: { bold: true, color: '#0E3F8C' }, cellStyle: { background: { color: '#F7F9FC' } } },&#10;                        { text: '27 项 pytest', textStyle: { bold: true, color: '#1E4FA8' }, cellStyle: { background: { color: '#F7F9FC' } } },&#10;                        { text: '含评分校准不变量 11 条（单调性 / 维度分离 / 确定性）', cellStyle: { background: { color: '#F7F9FC' } } },&#10;                    ],&#10;                    [&#10;                        { text: '单元', textStyle: { bold: true, color: '#0E3F8C' } },&#10;                        { text: '217 项 Node', textStyle: { bold: true, color: '#1E4FA8' } },&#10;                        { text: 'store / 用户系统 / 简历 / 报告逻辑' },&#10;                    ],&#10;                    [&#10;                        { text: '对拍', textStyle: { bold: true, color: '#0E3F8C' }, cellStyle: { background: { color: '#F7F9FC' } } },&#10;                        { text: '5/5 一致', textStyle: { bold: true, color: '#1E4FA8' }, cellStyle: { background: { color: '#F7F9FC' } } },&#10;                        { text: '双引擎评分共用同一份标准样本逐维度比对', cellStyle: { background: { color: '#F7F9FC' } } },&#10;                    ],&#10;                    [&#10;                        { text: '规范', textStyle: { bold: true, color: '#0E3F8C' } },&#10;                        { text: 'lint + 类型', textStyle: { bold: true, color: '#1E4FA8' } },&#10;                        { text: 'ESLint 0 error · Prettier 全绿 · JSDoc' },&#10;                    ],&#10;                ]}&#10;            /&gt;&#10;        &lt;/Box&gt;&#10;        {/* 发布链节点串 */}&#10;        &lt;Text style={{ fontSize: 16, fontWeight: 'bold', color: '#0E3F8C', letterSpacing: 1, marginTop: 20 }}&gt;&#10;            四渠道发布流水线&#10;        &lt;/Text&gt;&#10;        &lt;Box style={{ flexDirection: 'row', alignItems: 'center', gap: 10, marginTop: 12 }}&gt;&#10;            &lt;Box style={{ flex: 1, background: '#E8EFF8', border: '1px solid #C9D8F0', padding: '12px 8px', alignItems: 'center' }}&gt;&#10;                &lt;Text style={{ fontSize: 15, fontWeight: 'bold', color: '#0E3F8C' }}&gt;repo (main)&lt;/Text&gt;&#10;                &lt;Text style={{ fontSize: 12, color: '#4A5568', marginTop: 3 }}&gt;代码与文档单一事实源&lt;/Text&gt;&#10;            &lt;/Box&gt;&#10;            &lt;FAIcon name='arrow-right' style={{ fill: '#1E4FA8', width: 20, height: 20 }} /&gt;&#10;            &lt;Box style={{ flex: 1, background: '#E8EFF8', border: '1px solid #C9D8F0', padding: '12px 8px', alignItems: 'center' }}&gt;&#10;                &lt;Text style={{ fontSize: 15, fontWeight: 'bold', color: '#0E3F8C' }}&gt;GitHub Pages&lt;/Text&gt;&#10;                &lt;Text style={{ fontSize: 12, color: '#4A5568', marginTop: 3 }}&gt;海外演示入口&lt;/Text&gt;&#10;            &lt;/Box&gt;&#10;            &lt;FAIcon name='arrow-right' style={{ fill: '#1E4FA8', width: 20, height: 20 }} /&gt;&#10;            &lt;Box style={{ flex: 1, background: '#E8EFF8', border: '1px solid #C9D8F0', padding: '12px 8px', alignItems: 'center' }}&gt;&#10;                &lt;Text style={{ fontSize: 15, fontWeight: 'bold', color: '#0E3F8C' }}&gt;国内镜像&lt;/Text&gt;&#10;                &lt;Text style={{ fontSize: 12, color: '#4A5568', marginTop: 3 }}&gt;同源后端 · 赛场直连&lt;/Text&gt;&#10;            &lt;/Box&gt;&#10;            &lt;FAIcon name='arrow-right' style={{ fill: '#1E4FA8', width: 20, height: 20 }} /&gt;&#10;            &lt;Box style={{ flex: 1, background: '#E8EFF8', border: '1px solid #C9D8F0', padding: '12px 8px', alignItems: 'center' }}&gt;&#10;                &lt;Text style={{ fontSize: 15, fontWeight: 'bold', color: '#0E3F8C' }}&gt;Release 附件&lt;/Text&gt;&#10;                &lt;Text style={{ fontSize: 12, color: '#4A5568', marginTop: 3 }}&gt;demo / 文档 / PDF / 日志&lt;/Text&gt;&#10;            &lt;/Box&gt;&#10;        &lt;/Box&gt;&#10;    &lt;/Box&gt;&#10;    {/* ===== 母版：页脚 ===== */}&#10;    &lt;Box style={{ position: 'absolute', bottom: 0, left: 0, width: '1280px', height: 64, borderTop: '1px solid #E5E7EB', flexDirection: 'row', alignItems: 'center', justifyContent: 'space-between', padding: '0 40px', boxSizing: 'border-box' }}&gt;&#10;        &lt;Text style={{ fontSize: 13, color: '#8B97A8' }}&gt;&#10;            面镜 FutureMirror · 竞赛答辩&#10;        &lt;/Text&gt;&#10;        &lt;Text style={{ fontSize: 14, color: '#1E4FA8', fontWeight: 'bold' }}&gt;&#10;            14 / 16&#10;        &lt;/Text&gt;&#10;    &lt;/Box&gt;&#10;&lt;/Slide&gt;&#10;"/>
+        <p:cNvPr id="174" name="" descr="&lt;Slide style={{&#10;    width: '1280px',&#10;    height: '720px',&#10;    background: '#FFFFFF',&#10;    padding: 0,&#10;    position: 'relative',&#10;    overflow: 'hidden',&#10;    fontFamily: &quot;'Noto Sans SC','Source Han Sans SC','PingFang SC','Microsoft YaHei',sans-serif&quot;,&#10;}}&gt;&#10;    {/* ===== 母版：A3 深蓝顶条 ===== */}&#10;    &lt;Box style={{ position: 'absolute', top: 0, left: 0, width: '1280px', height: 84, background: '#0E3F8C' }}&gt;&#10;        &lt;svg style={{ position: 'absolute', right: 210, top: 18, opacity: 0.16 }} width={150} height={48} viewBox='0 0 150 48'&gt;&#10;            &lt;g stroke='#FFFFFF' strokeWidth='1.2' fill='none'&gt;&#10;                &lt;path d='M2 24 L28 24 L38 10 L74 10 L84 24 L120 24 L130 38 L148 38' /&gt;&#10;                &lt;path d='M38 10 L38 38 L74 38' /&gt;&#10;                &lt;circle cx='28' cy='24' r='3' fill='#FFFFFF' /&gt;&#10;                &lt;circle cx='84' cy='24' r='3' fill='#FFFFFF' /&gt;&#10;            &lt;/g&gt;&#10;        &lt;/svg&gt;&#10;        &lt;Box style={{ position: 'absolute', left: 40, top: 0, height: 84, justifyContent: 'center' }}&gt;&#10;            &lt;Text style={{ fontSize: 26, fontWeight: 'bold', color: '#FFFFFF' }}&gt;&#10;                工程质量：全量回归 + 四渠道发布流水线&#10;            &lt;/Text&gt;&#10;        &lt;/Box&gt;&#10;        &lt;Box style={{ position: 'absolute', right: 40, top: 24, background: '#1E4FA8', padding: '7px 16px', borderRadius: 14 }}&gt;&#10;            &lt;Text style={{ fontSize: 14, color: '#FFFFFF', letterSpacing: 1 }}&gt;&#10;                03 真实完成度&#10;            &lt;/Text&gt;&#10;        &lt;/Box&gt;&#10;    &lt;/Box&gt;&#10;    {/* ===== 左侧标题栏 ===== */}&#10;    &lt;Box style={{ position: 'absolute', top: 84, left: 0, width: 356, height: 572, background: '#0E3F8C', padding: '30px 32px 26px 40px', boxSizing: 'border-box', flexDirection: 'column' }}&gt;&#10;        &lt;Text style={{ fontSize: 14, color: '#9FB9E4', letterSpacing: 4 }}&gt;&#10;            测试与发布&#10;        &lt;/Text&gt;&#10;        &lt;Text style={{ fontSize: 30, fontWeight: 'bold', color: '#FFFFFF', marginTop: 14, lineHeight: 1.35 }}&gt;&#10;            全量回归纪律&#10;        &lt;/Text&gt;&#10;        &lt;Box style={{ width: 48, height: 4, background: '#FFC107', marginTop: 18 }} /&gt;&#10;        &lt;Text style={{ fontSize: 15, color: '#D7E3F5', lineHeight: 1.85, marginTop: 18 }}&gt;&#10;            每次改动必须全绿才提交——测试不是演示后的补丁，而是改动发生时的第一道闸门。能复现的工程纪律，是「团队可完整解释全部代码」的底座。&#10;        &lt;/Text&gt;&#10;        &lt;Box style={{ flex: 1 }} /&gt;&#10;        &lt;Box style={{ background: '#1E4FA8', padding: '14px 16px' }}&gt;&#10;            &lt;Text style={{ fontSize: 15, fontWeight: 'bold', color: '#FFFFFF' }}&gt;&#10;                发布链&#10;            &lt;/Text&gt;&#10;            &lt;Text style={{ fontSize: 14, color: '#D7E3F5', marginTop: 6, lineHeight: 1.6 }}&gt;&#10;                repo → Pages → 镜像 → Release&lt;br /&gt;每次变更后逐一核验&#10;            &lt;/Text&gt;&#10;        &lt;/Box&gt;&#10;    &lt;/Box&gt;&#10;    {/* ===== 右侧测试矩阵 + 发布链 ===== */}&#10;    &lt;Box style={{ position: 'absolute', top: 84, left: 356, width: 924, height: 572, padding: '24px 36px', boxSizing: 'border-box' }}&gt;&#10;        &lt;Text style={{ fontSize: 16, fontWeight: 'bold', color: '#0E3F8C', letterSpacing: 1 }}&gt;&#10;            测试矩阵（全部可当场重跑）&#10;        &lt;/Text&gt;&#10;        &lt;Box style={{ marginTop: 12, height: 252 }}&gt;&#10;            &lt;Table&#10;                style={{ width: '100%', height: 252 }}&#10;                defaultTextStyle={{ fontSize: 13.5, textAlign: 'center', color: '#1A2230' }}&#10;                defaultCellStyle={{&#10;                    border: {&#10;                        left: { width: 1, color: '#D6DCE5' },&#10;                        right: { width: 1, color: '#D6DCE5' },&#10;                        top: { width: 1, color: '#D6DCE5' },&#10;                        bottom: { width: 1, color: '#D6DCE5' },&#10;                    },&#10;                }}&#10;                cells={[&#10;                    [&#10;                        { text: '层', textStyle: { bold: true, color: '#FFFFFF' }, cellStyle: { background: { color: '#0E3F8C' } } },&#10;                        { text: '规模', textStyle: { bold: true, color: '#FFFFFF' }, cellStyle: { background: { color: '#0E3F8C' } } },&#10;                        { text: '覆盖内容', textStyle: { bold: true, color: '#FFFFFF' }, cellStyle: { background: { color: '#0E3F8C' } } },&#10;                    ],&#10;                    [&#10;                        { text: '前端', textStyle: { bold: true, color: '#0E3F8C' } },&#10;                        { text: '19 套 · 1427 断言', textStyle: { bold: true, color: '#1E4FA8' } },&#10;                        { text: 'jsdom 端到端（含 RAG 重排专项 9 条）' },&#10;                    ],&#10;                    [&#10;                        { text: '后端', textStyle: { bold: true, color: '#0E3F8C' }, cellStyle: { background: { color: '#F7F9FC' } } },&#10;                        { text: '29 项 pytest', textStyle: { bold: true, color: '#1E4FA8' }, cellStyle: { background: { color: '#F7F9FC' } } },&#10;                        { text: '含评分校准不变量 11 条（单调性 / 维度分离 / 确定性）', cellStyle: { background: { color: '#F7F9FC' } } },&#10;                    ],&#10;                    [&#10;                        { text: '单元', textStyle: { bold: true, color: '#0E3F8C' } },&#10;                        { text: '217 项 Node', textStyle: { bold: true, color: '#1E4FA8' } },&#10;                        { text: 'store / 用户系统 / 简历 / 报告逻辑' },&#10;                    ],&#10;                    [&#10;                        { text: '对拍', textStyle: { bold: true, color: '#0E3F8C' }, cellStyle: { background: { color: '#F7F9FC' } } },&#10;                        { text: '5/5 一致', textStyle: { bold: true, color: '#1E4FA8' }, cellStyle: { background: { color: '#F7F9FC' } } },&#10;                        { text: '双引擎评分共用同一份标准样本逐维度比对', cellStyle: { background: { color: '#F7F9FC' } } },&#10;                    ],&#10;                    [&#10;                        { text: '规范', textStyle: { bold: true, color: '#0E3F8C' } },&#10;                        { text: 'lint + 类型', textStyle: { bold: true, color: '#1E4FA8' } },&#10;                        { text: 'ESLint 0 error · Prettier 全绿 · JSDoc' },&#10;                    ],&#10;                ]}&#10;            /&gt;&#10;        &lt;/Box&gt;&#10;        {/* 发布链节点串 */}&#10;        &lt;Text style={{ fontSize: 16, fontWeight: 'bold', color: '#0E3F8C', letterSpacing: 1, marginTop: 20 }}&gt;&#10;            四渠道发布流水线&#10;        &lt;/Text&gt;&#10;        &lt;Box style={{ flexDirection: 'row', alignItems: 'center', gap: 10, marginTop: 12 }}&gt;&#10;            &lt;Box style={{ flex: 1, background: '#E8EFF8', border: '1px solid #C9D8F0', padding: '12px 8px', alignItems: 'center' }}&gt;&#10;                &lt;Text style={{ fontSize: 15, fontWeight: 'bold', color: '#0E3F8C' }}&gt;repo (main)&lt;/Text&gt;&#10;                &lt;Text style={{ fontSize: 12, color: '#4A5568', marginTop: 3 }}&gt;代码与文档单一事实源&lt;/Text&gt;&#10;            &lt;/Box&gt;&#10;            &lt;FAIcon name='arrow-right' style={{ fill: '#1E4FA8', width: 20, height: 20 }} /&gt;&#10;            &lt;Box style={{ flex: 1, background: '#E8EFF8', border: '1px solid #C9D8F0', padding: '12px 8px', alignItems: 'center' }}&gt;&#10;                &lt;Text style={{ fontSize: 15, fontWeight: 'bold', color: '#0E3F8C' }}&gt;GitHub Pages&lt;/Text&gt;&#10;                &lt;Text style={{ fontSize: 12, color: '#4A5568', marginTop: 3 }}&gt;海外演示入口&lt;/Text&gt;&#10;            &lt;/Box&gt;&#10;            &lt;FAIcon name='arrow-right' style={{ fill: '#1E4FA8', width: 20, height: 20 }} /&gt;&#10;            &lt;Box style={{ flex: 1, background: '#E8EFF8', border: '1px solid #C9D8F0', padding: '12px 8px', alignItems: 'center' }}&gt;&#10;                &lt;Text style={{ fontSize: 15, fontWeight: 'bold', color: '#0E3F8C' }}&gt;国内镜像&lt;/Text&gt;&#10;                &lt;Text style={{ fontSize: 12, color: '#4A5568', marginTop: 3 }}&gt;同源后端 · 赛场直连&lt;/Text&gt;&#10;            &lt;/Box&gt;&#10;            &lt;FAIcon name='arrow-right' style={{ fill: '#1E4FA8', width: 20, height: 20 }} /&gt;&#10;            &lt;Box style={{ flex: 1, background: '#E8EFF8', border: '1px solid #C9D8F0', padding: '12px 8px', alignItems: 'center' }}&gt;&#10;                &lt;Text style={{ fontSize: 15, fontWeight: 'bold', color: '#0E3F8C' }}&gt;Release 附件&lt;/Text&gt;&#10;                &lt;Text style={{ fontSize: 12, color: '#4A5568', marginTop: 3 }}&gt;demo / 文档 / PDF / 日志&lt;/Text&gt;&#10;            &lt;/Box&gt;&#10;        &lt;/Box&gt;&#10;    &lt;/Box&gt;&#10;    {/* ===== 母版：页脚 ===== */}&#10;    &lt;Box style={{ position: 'absolute', bottom: 0, left: 0, width: '1280px', height: 64, borderTop: '1px solid #E5E7EB', flexDirection: 'row', alignItems: 'center', justifyContent: 'space-between', padding: '0 40px', boxSizing: 'border-box' }}&gt;&#10;        &lt;Text style={{ fontSize: 13, color: '#8B97A8' }}&gt;&#10;            面镜 FutureMirror · 竞赛答辩&#10;        &lt;/Text&gt;&#10;        &lt;Text style={{ fontSize: 14, color: '#1E4FA8', fontWeight: 'bold' }}&gt;&#10;            14 / 16&#10;        &lt;/Text&gt;&#10;    &lt;/Box&gt;&#10;&lt;/Slide&gt;&#10;"/>
         <p:cNvGrpSpPr/>
         <p:nvPr/>
       </p:nvGrpSpPr>
@@ -10590,7 +10590,7 @@
                           <a:latin typeface="Microsoft YaHei"/>
                           <a:ea typeface="Microsoft YaHei"/>
                         </a:rPr>
-                        <a:t>27 项 pytest</a:t>
+                        <a:t>29 项 pytest</a:t>
                       </a:r>
                       <a:endParaRPr/>
                     </a:p>
